--- a/labs/40-property-based-testing/result/linkedin/lab-40-property-based-testing-carousel.pptx
+++ b/labs/40-property-based-testing/result/linkedin/lab-40-property-based-testing-carousel.pptx
@@ -6592,63 +6592,35 @@
       </p:sp>
       <p:sp>
         <p:nvSpPr>
-          <p:cNvPr id="6" name="Rounded Rectangle 5"/>
-          <p:cNvSpPr/>
-          <p:nvPr/>
-        </p:nvSpPr>
-        <p:spPr>
-          <a:xfrm>
-            <a:off x="914400" y="4389120"/>
-            <a:ext cx="10362895" cy="1645920"/>
-          </a:xfrm>
-          <a:prstGeom prst="roundRect">
-            <a:avLst/>
-          </a:prstGeom>
-          <a:solidFill>
-            <a:srgbClr val="1E293B"/>
-          </a:solidFill>
-          <a:ln>
-            <a:solidFill>
-              <a:srgbClr val="087F76"/>
-            </a:solidFill>
-          </a:ln>
-        </p:spPr>
-        <p:style>
-          <a:lnRef idx="1">
-            <a:schemeClr val="accent1"/>
-          </a:lnRef>
-          <a:fillRef idx="3">
-            <a:schemeClr val="accent1"/>
-          </a:fillRef>
-          <a:effectRef idx="2">
-            <a:schemeClr val="accent1"/>
-          </a:effectRef>
-          <a:fontRef idx="minor">
-            <a:schemeClr val="lt1"/>
-          </a:fontRef>
-        </p:style>
-        <p:txBody>
-          <a:bodyPr rtlCol="0" anchor="ctr" wrap="square"/>
-          <a:lstStyle/>
-          <a:p>
-            <a:pPr algn="ctr">
-              <a:defRPr sz="1500">
-                <a:solidFill>
-                  <a:srgbClr val="087F76"/>
-                </a:solidFill>
-                <a:latin typeface="Courier New"/>
-              </a:defRPr>
-            </a:pPr>
-            <a:r>
-              <a:t>&gt; system_check --lab 40 --topic 'property-based-testing'</a:t>
-            </a:r>
-            <a:br/>
-            <a:r>
-              <a:t>&gt; author: Lukman / lukman-ss | status: PRODUCTION VERIFIED</a:t>
-            </a:r>
-            <a:br/>
-            <a:r>
-              <a:t>&gt; commit: 7d244968 | tests: PASS</a:t>
+          <p:cNvPr id="6" name="TextBox 5"/>
+          <p:cNvSpPr txBox="1"/>
+          <p:nvPr/>
+        </p:nvSpPr>
+        <p:spPr>
+          <a:xfrm>
+            <a:off x="914400" y="5303520"/>
+            <a:ext cx="5486400" cy="548640"/>
+          </a:xfrm>
+          <a:prstGeom prst="rect">
+            <a:avLst/>
+          </a:prstGeom>
+          <a:noFill/>
+        </p:spPr>
+        <p:txBody>
+          <a:bodyPr wrap="none">
+            <a:spAutoFit/>
+          </a:bodyPr>
+          <a:lstStyle/>
+          <a:p>
+            <a:pPr>
+              <a:defRPr sz="1800" b="1">
+                <a:solidFill>
+                  <a:srgbClr val="D97706"/>
+                </a:solidFill>
+              </a:defRPr>
+            </a:pPr>
+            <a:r>
+              <a:t>Lukman / lukman-ss</a:t>
             </a:r>
           </a:p>
         </p:txBody>
@@ -8960,7 +8932,7 @@
         </p:nvGraphicFramePr>
         <p:xfrm>
           <a:off x="731520" y="1828800"/>
-          <a:ext cx="5120640" cy="1828800"/>
+          <a:ext cx="5120640" cy="1645920"/>
         </p:xfrm>
         <a:graphic>
           <a:graphicData uri="http://schemas.openxmlformats.org/drawingml/2006/table">
@@ -8973,14 +8945,14 @@
                 <a:gridCol w="1706880"/>
                 <a:gridCol w="1706880"/>
               </a:tblGrid>
-              <a:tr h="457200">
+              <a:tr h="411480">
                 <a:tc>
                   <a:txBody>
                     <a:bodyPr/>
                     <a:lstStyle/>
                     <a:p>
                       <a:pPr>
-                        <a:defRPr b="1" sz="1100">
+                        <a:defRPr b="1" sz="1000">
                           <a:solidFill>
                             <a:srgbClr val="FFFFFF"/>
                           </a:solidFill>
@@ -9003,7 +8975,7 @@
                     <a:lstStyle/>
                     <a:p>
                       <a:pPr>
-                        <a:defRPr b="1" sz="1100">
+                        <a:defRPr b="1" sz="1000">
                           <a:solidFill>
                             <a:srgbClr val="FFFFFF"/>
                           </a:solidFill>
@@ -9026,7 +8998,7 @@
                     <a:lstStyle/>
                     <a:p>
                       <a:pPr>
-                        <a:defRPr b="1" sz="1100">
+                        <a:defRPr b="1" sz="1000">
                           <a:solidFill>
                             <a:srgbClr val="FFFFFF"/>
                           </a:solidFill>
@@ -9044,14 +9016,14 @@
                   </a:tcPr>
                 </a:tc>
               </a:tr>
-              <a:tr h="457200">
+              <a:tr h="411480">
                 <a:tc>
                   <a:txBody>
                     <a:bodyPr/>
                     <a:lstStyle/>
                     <a:p>
                       <a:pPr>
-                        <a:defRPr sz="1000">
+                        <a:defRPr sz="900">
                           <a:solidFill>
                             <a:srgbClr val="0B1B2D"/>
                           </a:solidFill>
@@ -9074,7 +9046,7 @@
                     <a:lstStyle/>
                     <a:p>
                       <a:pPr>
-                        <a:defRPr sz="1000">
+                        <a:defRPr sz="900">
                           <a:solidFill>
                             <a:srgbClr val="0B1B2D"/>
                           </a:solidFill>
@@ -9097,7 +9069,7 @@
                     <a:lstStyle/>
                     <a:p>
                       <a:pPr>
-                        <a:defRPr sz="1000">
+                        <a:defRPr sz="900">
                           <a:solidFill>
                             <a:srgbClr val="0B1B2D"/>
                           </a:solidFill>
@@ -9115,14 +9087,14 @@
                   </a:tcPr>
                 </a:tc>
               </a:tr>
-              <a:tr h="457200">
+              <a:tr h="411480">
                 <a:tc>
                   <a:txBody>
                     <a:bodyPr/>
                     <a:lstStyle/>
                     <a:p>
                       <a:pPr>
-                        <a:defRPr sz="1000">
+                        <a:defRPr sz="900">
                           <a:solidFill>
                             <a:srgbClr val="0B1B2D"/>
                           </a:solidFill>
@@ -9145,7 +9117,7 @@
                     <a:lstStyle/>
                     <a:p>
                       <a:pPr>
-                        <a:defRPr sz="1000">
+                        <a:defRPr sz="900">
                           <a:solidFill>
                             <a:srgbClr val="0B1B2D"/>
                           </a:solidFill>
@@ -9168,7 +9140,7 @@
                     <a:lstStyle/>
                     <a:p>
                       <a:pPr>
-                        <a:defRPr sz="1000">
+                        <a:defRPr sz="900">
                           <a:solidFill>
                             <a:srgbClr val="0B1B2D"/>
                           </a:solidFill>
@@ -9186,14 +9158,14 @@
                   </a:tcPr>
                 </a:tc>
               </a:tr>
-              <a:tr h="457200">
+              <a:tr h="411480">
                 <a:tc>
                   <a:txBody>
                     <a:bodyPr/>
                     <a:lstStyle/>
                     <a:p>
                       <a:pPr>
-                        <a:defRPr sz="1000">
+                        <a:defRPr sz="900">
                           <a:solidFill>
                             <a:srgbClr val="0B1B2D"/>
                           </a:solidFill>
@@ -9216,7 +9188,7 @@
                     <a:lstStyle/>
                     <a:p>
                       <a:pPr>
-                        <a:defRPr sz="1000">
+                        <a:defRPr sz="900">
                           <a:solidFill>
                             <a:srgbClr val="0B1B2D"/>
                           </a:solidFill>
@@ -9239,7 +9211,7 @@
                     <a:lstStyle/>
                     <a:p>
                       <a:pPr>
-                        <a:defRPr sz="1000">
+                        <a:defRPr sz="900">
                           <a:solidFill>
                             <a:srgbClr val="0B1B2D"/>
                           </a:solidFill>
@@ -11745,7 +11717,7 @@
         </p:nvGraphicFramePr>
         <p:xfrm>
           <a:off x="731520" y="1828800"/>
-          <a:ext cx="5120640" cy="1828800"/>
+          <a:ext cx="5120640" cy="1645920"/>
         </p:xfrm>
         <a:graphic>
           <a:graphicData uri="http://schemas.openxmlformats.org/drawingml/2006/table">
@@ -11759,14 +11731,14 @@
                 <a:gridCol w="1280160"/>
                 <a:gridCol w="1280160"/>
               </a:tblGrid>
-              <a:tr h="457200">
+              <a:tr h="411480">
                 <a:tc>
                   <a:txBody>
                     <a:bodyPr/>
                     <a:lstStyle/>
                     <a:p>
                       <a:pPr>
-                        <a:defRPr b="1" sz="1100">
+                        <a:defRPr b="1" sz="1000">
                           <a:solidFill>
                             <a:srgbClr val="FFFFFF"/>
                           </a:solidFill>
@@ -11789,7 +11761,7 @@
                     <a:lstStyle/>
                     <a:p>
                       <a:pPr>
-                        <a:defRPr b="1" sz="1100">
+                        <a:defRPr b="1" sz="1000">
                           <a:solidFill>
                             <a:srgbClr val="FFFFFF"/>
                           </a:solidFill>
@@ -11812,7 +11784,7 @@
                     <a:lstStyle/>
                     <a:p>
                       <a:pPr>
-                        <a:defRPr b="1" sz="1100">
+                        <a:defRPr b="1" sz="1000">
                           <a:solidFill>
                             <a:srgbClr val="FFFFFF"/>
                           </a:solidFill>
@@ -11835,7 +11807,7 @@
                     <a:lstStyle/>
                     <a:p>
                       <a:pPr>
-                        <a:defRPr b="1" sz="1100">
+                        <a:defRPr b="1" sz="1000">
                           <a:solidFill>
                             <a:srgbClr val="FFFFFF"/>
                           </a:solidFill>
@@ -11853,14 +11825,14 @@
                   </a:tcPr>
                 </a:tc>
               </a:tr>
-              <a:tr h="457200">
+              <a:tr h="411480">
                 <a:tc>
                   <a:txBody>
                     <a:bodyPr/>
                     <a:lstStyle/>
                     <a:p>
                       <a:pPr>
-                        <a:defRPr sz="1000">
+                        <a:defRPr sz="900">
                           <a:solidFill>
                             <a:srgbClr val="0B1B2D"/>
                           </a:solidFill>
@@ -11883,7 +11855,7 @@
                     <a:lstStyle/>
                     <a:p>
                       <a:pPr>
-                        <a:defRPr sz="1000">
+                        <a:defRPr sz="900">
                           <a:solidFill>
                             <a:srgbClr val="0B1B2D"/>
                           </a:solidFill>
@@ -11906,7 +11878,7 @@
                     <a:lstStyle/>
                     <a:p>
                       <a:pPr>
-                        <a:defRPr sz="1000">
+                        <a:defRPr sz="900">
                           <a:solidFill>
                             <a:srgbClr val="0B1B2D"/>
                           </a:solidFill>
@@ -11929,7 +11901,7 @@
                     <a:lstStyle/>
                     <a:p>
                       <a:pPr>
-                        <a:defRPr sz="1000">
+                        <a:defRPr sz="900">
                           <a:solidFill>
                             <a:srgbClr val="0B1B2D"/>
                           </a:solidFill>
@@ -11947,14 +11919,14 @@
                   </a:tcPr>
                 </a:tc>
               </a:tr>
-              <a:tr h="457200">
+              <a:tr h="411480">
                 <a:tc>
                   <a:txBody>
                     <a:bodyPr/>
                     <a:lstStyle/>
                     <a:p>
                       <a:pPr>
-                        <a:defRPr sz="1000">
+                        <a:defRPr sz="900">
                           <a:solidFill>
                             <a:srgbClr val="0B1B2D"/>
                           </a:solidFill>
@@ -11977,7 +11949,7 @@
                     <a:lstStyle/>
                     <a:p>
                       <a:pPr>
-                        <a:defRPr sz="1000">
+                        <a:defRPr sz="900">
                           <a:solidFill>
                             <a:srgbClr val="0B1B2D"/>
                           </a:solidFill>
@@ -12000,7 +11972,7 @@
                     <a:lstStyle/>
                     <a:p>
                       <a:pPr>
-                        <a:defRPr sz="1000">
+                        <a:defRPr sz="900">
                           <a:solidFill>
                             <a:srgbClr val="0B1B2D"/>
                           </a:solidFill>
@@ -12023,7 +11995,7 @@
                     <a:lstStyle/>
                     <a:p>
                       <a:pPr>
-                        <a:defRPr sz="1000">
+                        <a:defRPr sz="900">
                           <a:solidFill>
                             <a:srgbClr val="0B1B2D"/>
                           </a:solidFill>
@@ -12041,14 +12013,14 @@
                   </a:tcPr>
                 </a:tc>
               </a:tr>
-              <a:tr h="457200">
+              <a:tr h="411480">
                 <a:tc>
                   <a:txBody>
                     <a:bodyPr/>
                     <a:lstStyle/>
                     <a:p>
                       <a:pPr>
-                        <a:defRPr sz="1000">
+                        <a:defRPr sz="900">
                           <a:solidFill>
                             <a:srgbClr val="0B1B2D"/>
                           </a:solidFill>
@@ -12071,7 +12043,7 @@
                     <a:lstStyle/>
                     <a:p>
                       <a:pPr>
-                        <a:defRPr sz="1000">
+                        <a:defRPr sz="900">
                           <a:solidFill>
                             <a:srgbClr val="0B1B2D"/>
                           </a:solidFill>
@@ -12094,7 +12066,7 @@
                     <a:lstStyle/>
                     <a:p>
                       <a:pPr>
-                        <a:defRPr sz="1000">
+                        <a:defRPr sz="900">
                           <a:solidFill>
                             <a:srgbClr val="0B1B2D"/>
                           </a:solidFill>
@@ -12117,7 +12089,7 @@
                     <a:lstStyle/>
                     <a:p>
                       <a:pPr>
-                        <a:defRPr sz="1000">
+                        <a:defRPr sz="900">
                           <a:solidFill>
                             <a:srgbClr val="0B1B2D"/>
                           </a:solidFill>
@@ -12475,7 +12447,7 @@
         </p:nvGraphicFramePr>
         <p:xfrm>
           <a:off x="731520" y="1828800"/>
-          <a:ext cx="5120640" cy="2743200"/>
+          <a:ext cx="5120640" cy="2468880"/>
         </p:xfrm>
         <a:graphic>
           <a:graphicData uri="http://schemas.openxmlformats.org/drawingml/2006/table">
@@ -12488,14 +12460,14 @@
                 <a:gridCol w="1706880"/>
                 <a:gridCol w="1706880"/>
               </a:tblGrid>
-              <a:tr h="457200">
+              <a:tr h="411480">
                 <a:tc>
                   <a:txBody>
                     <a:bodyPr/>
                     <a:lstStyle/>
                     <a:p>
                       <a:pPr>
-                        <a:defRPr b="1" sz="1100">
+                        <a:defRPr b="1" sz="1000">
                           <a:solidFill>
                             <a:srgbClr val="FFFFFF"/>
                           </a:solidFill>
@@ -12518,7 +12490,7 @@
                     <a:lstStyle/>
                     <a:p>
                       <a:pPr>
-                        <a:defRPr b="1" sz="1100">
+                        <a:defRPr b="1" sz="1000">
                           <a:solidFill>
                             <a:srgbClr val="FFFFFF"/>
                           </a:solidFill>
@@ -12541,7 +12513,7 @@
                     <a:lstStyle/>
                     <a:p>
                       <a:pPr>
-                        <a:defRPr b="1" sz="1100">
+                        <a:defRPr b="1" sz="1000">
                           <a:solidFill>
                             <a:srgbClr val="FFFFFF"/>
                           </a:solidFill>
@@ -12559,14 +12531,14 @@
                   </a:tcPr>
                 </a:tc>
               </a:tr>
-              <a:tr h="457200">
+              <a:tr h="411480">
                 <a:tc>
                   <a:txBody>
                     <a:bodyPr/>
                     <a:lstStyle/>
                     <a:p>
                       <a:pPr>
-                        <a:defRPr sz="1000">
+                        <a:defRPr sz="900">
                           <a:solidFill>
                             <a:srgbClr val="0B1B2D"/>
                           </a:solidFill>
@@ -12589,7 +12561,7 @@
                     <a:lstStyle/>
                     <a:p>
                       <a:pPr>
-                        <a:defRPr sz="1000">
+                        <a:defRPr sz="900">
                           <a:solidFill>
                             <a:srgbClr val="0B1B2D"/>
                           </a:solidFill>
@@ -12612,7 +12584,7 @@
                     <a:lstStyle/>
                     <a:p>
                       <a:pPr>
-                        <a:defRPr sz="1000">
+                        <a:defRPr sz="900">
                           <a:solidFill>
                             <a:srgbClr val="0B1B2D"/>
                           </a:solidFill>
@@ -12630,14 +12602,14 @@
                   </a:tcPr>
                 </a:tc>
               </a:tr>
-              <a:tr h="457200">
+              <a:tr h="411480">
                 <a:tc>
                   <a:txBody>
                     <a:bodyPr/>
                     <a:lstStyle/>
                     <a:p>
                       <a:pPr>
-                        <a:defRPr sz="1000">
+                        <a:defRPr sz="900">
                           <a:solidFill>
                             <a:srgbClr val="0B1B2D"/>
                           </a:solidFill>
@@ -12660,7 +12632,7 @@
                     <a:lstStyle/>
                     <a:p>
                       <a:pPr>
-                        <a:defRPr sz="1000">
+                        <a:defRPr sz="900">
                           <a:solidFill>
                             <a:srgbClr val="0B1B2D"/>
                           </a:solidFill>
@@ -12683,7 +12655,7 @@
                     <a:lstStyle/>
                     <a:p>
                       <a:pPr>
-                        <a:defRPr sz="1000">
+                        <a:defRPr sz="900">
                           <a:solidFill>
                             <a:srgbClr val="0B1B2D"/>
                           </a:solidFill>
@@ -12701,14 +12673,14 @@
                   </a:tcPr>
                 </a:tc>
               </a:tr>
-              <a:tr h="457200">
+              <a:tr h="411480">
                 <a:tc>
                   <a:txBody>
                     <a:bodyPr/>
                     <a:lstStyle/>
                     <a:p>
                       <a:pPr>
-                        <a:defRPr sz="1000">
+                        <a:defRPr sz="900">
                           <a:solidFill>
                             <a:srgbClr val="0B1B2D"/>
                           </a:solidFill>
@@ -12731,7 +12703,7 @@
                     <a:lstStyle/>
                     <a:p>
                       <a:pPr>
-                        <a:defRPr sz="1000">
+                        <a:defRPr sz="900">
                           <a:solidFill>
                             <a:srgbClr val="0B1B2D"/>
                           </a:solidFill>
@@ -12754,7 +12726,7 @@
                     <a:lstStyle/>
                     <a:p>
                       <a:pPr>
-                        <a:defRPr sz="1000">
+                        <a:defRPr sz="900">
                           <a:solidFill>
                             <a:srgbClr val="0B1B2D"/>
                           </a:solidFill>
@@ -12772,14 +12744,14 @@
                   </a:tcPr>
                 </a:tc>
               </a:tr>
-              <a:tr h="457200">
+              <a:tr h="411480">
                 <a:tc>
                   <a:txBody>
                     <a:bodyPr/>
                     <a:lstStyle/>
                     <a:p>
                       <a:pPr>
-                        <a:defRPr sz="1000">
+                        <a:defRPr sz="900">
                           <a:solidFill>
                             <a:srgbClr val="0B1B2D"/>
                           </a:solidFill>
@@ -12802,7 +12774,7 @@
                     <a:lstStyle/>
                     <a:p>
                       <a:pPr>
-                        <a:defRPr sz="1000">
+                        <a:defRPr sz="900">
                           <a:solidFill>
                             <a:srgbClr val="0B1B2D"/>
                           </a:solidFill>
@@ -12825,7 +12797,7 @@
                     <a:lstStyle/>
                     <a:p>
                       <a:pPr>
-                        <a:defRPr sz="1000">
+                        <a:defRPr sz="900">
                           <a:solidFill>
                             <a:srgbClr val="0B1B2D"/>
                           </a:solidFill>
@@ -12843,14 +12815,14 @@
                   </a:tcPr>
                 </a:tc>
               </a:tr>
-              <a:tr h="457200">
+              <a:tr h="411480">
                 <a:tc>
                   <a:txBody>
                     <a:bodyPr/>
                     <a:lstStyle/>
                     <a:p>
                       <a:pPr>
-                        <a:defRPr sz="1000">
+                        <a:defRPr sz="900">
                           <a:solidFill>
                             <a:srgbClr val="0B1B2D"/>
                           </a:solidFill>
@@ -12873,7 +12845,7 @@
                     <a:lstStyle/>
                     <a:p>
                       <a:pPr>
-                        <a:defRPr sz="1000">
+                        <a:defRPr sz="900">
                           <a:solidFill>
                             <a:srgbClr val="0B1B2D"/>
                           </a:solidFill>
@@ -12896,7 +12868,7 @@
                     <a:lstStyle/>
                     <a:p>
                       <a:pPr>
-                        <a:defRPr sz="1000">
+                        <a:defRPr sz="900">
                           <a:solidFill>
                             <a:srgbClr val="0B1B2D"/>
                           </a:solidFill>
@@ -14185,7 +14157,11 @@
               </a:defRPr>
             </a:pPr>
             <a:r>
-              <a:t>github.com/lukman-ss/software-engineering-lab/tree/main/labs/40-property-based-testing</a:t>
+              <a:t>github.com/lukman-ss/software-engineering-lab</a:t>
+            </a:r>
+            <a:br/>
+            <a:r>
+              <a:t>labs/40-property-based-testing</a:t>
             </a:r>
           </a:p>
         </p:txBody>
@@ -14507,7 +14483,7 @@
         </p:nvGraphicFramePr>
         <p:xfrm>
           <a:off x="731520" y="1828800"/>
-          <a:ext cx="5120640" cy="1828800"/>
+          <a:ext cx="5120640" cy="1645920"/>
         </p:xfrm>
         <a:graphic>
           <a:graphicData uri="http://schemas.openxmlformats.org/drawingml/2006/table">
@@ -14520,14 +14496,14 @@
                 <a:gridCol w="1706880"/>
                 <a:gridCol w="1706880"/>
               </a:tblGrid>
-              <a:tr h="457200">
+              <a:tr h="411480">
                 <a:tc>
                   <a:txBody>
                     <a:bodyPr/>
                     <a:lstStyle/>
                     <a:p>
                       <a:pPr>
-                        <a:defRPr b="1" sz="1100">
+                        <a:defRPr b="1" sz="1000">
                           <a:solidFill>
                             <a:srgbClr val="FFFFFF"/>
                           </a:solidFill>
@@ -14550,7 +14526,7 @@
                     <a:lstStyle/>
                     <a:p>
                       <a:pPr>
-                        <a:defRPr b="1" sz="1100">
+                        <a:defRPr b="1" sz="1000">
                           <a:solidFill>
                             <a:srgbClr val="FFFFFF"/>
                           </a:solidFill>
@@ -14573,7 +14549,7 @@
                     <a:lstStyle/>
                     <a:p>
                       <a:pPr>
-                        <a:defRPr b="1" sz="1100">
+                        <a:defRPr b="1" sz="1000">
                           <a:solidFill>
                             <a:srgbClr val="FFFFFF"/>
                           </a:solidFill>
@@ -14591,14 +14567,14 @@
                   </a:tcPr>
                 </a:tc>
               </a:tr>
-              <a:tr h="457200">
+              <a:tr h="411480">
                 <a:tc>
                   <a:txBody>
                     <a:bodyPr/>
                     <a:lstStyle/>
                     <a:p>
                       <a:pPr>
-                        <a:defRPr sz="1000">
+                        <a:defRPr sz="900">
                           <a:solidFill>
                             <a:srgbClr val="0B1B2D"/>
                           </a:solidFill>
@@ -14621,7 +14597,7 @@
                     <a:lstStyle/>
                     <a:p>
                       <a:pPr>
-                        <a:defRPr sz="1000">
+                        <a:defRPr sz="900">
                           <a:solidFill>
                             <a:srgbClr val="0B1B2D"/>
                           </a:solidFill>
@@ -14644,7 +14620,7 @@
                     <a:lstStyle/>
                     <a:p>
                       <a:pPr>
-                        <a:defRPr sz="1000">
+                        <a:defRPr sz="900">
                           <a:solidFill>
                             <a:srgbClr val="0B1B2D"/>
                           </a:solidFill>
@@ -14662,14 +14638,14 @@
                   </a:tcPr>
                 </a:tc>
               </a:tr>
-              <a:tr h="457200">
+              <a:tr h="411480">
                 <a:tc>
                   <a:txBody>
                     <a:bodyPr/>
                     <a:lstStyle/>
                     <a:p>
                       <a:pPr>
-                        <a:defRPr sz="1000">
+                        <a:defRPr sz="900">
                           <a:solidFill>
                             <a:srgbClr val="0B1B2D"/>
                           </a:solidFill>
@@ -14692,7 +14668,7 @@
                     <a:lstStyle/>
                     <a:p>
                       <a:pPr>
-                        <a:defRPr sz="1000">
+                        <a:defRPr sz="900">
                           <a:solidFill>
                             <a:srgbClr val="0B1B2D"/>
                           </a:solidFill>
@@ -14715,7 +14691,7 @@
                     <a:lstStyle/>
                     <a:p>
                       <a:pPr>
-                        <a:defRPr sz="1000">
+                        <a:defRPr sz="900">
                           <a:solidFill>
                             <a:srgbClr val="0B1B2D"/>
                           </a:solidFill>
@@ -14733,14 +14709,14 @@
                   </a:tcPr>
                 </a:tc>
               </a:tr>
-              <a:tr h="457200">
+              <a:tr h="411480">
                 <a:tc>
                   <a:txBody>
                     <a:bodyPr/>
                     <a:lstStyle/>
                     <a:p>
                       <a:pPr>
-                        <a:defRPr sz="1000">
+                        <a:defRPr sz="900">
                           <a:solidFill>
                             <a:srgbClr val="0B1B2D"/>
                           </a:solidFill>
@@ -14763,7 +14739,7 @@
                     <a:lstStyle/>
                     <a:p>
                       <a:pPr>
-                        <a:defRPr sz="1000">
+                        <a:defRPr sz="900">
                           <a:solidFill>
                             <a:srgbClr val="0B1B2D"/>
                           </a:solidFill>
@@ -14786,7 +14762,7 @@
                     <a:lstStyle/>
                     <a:p>
                       <a:pPr>
-                        <a:defRPr sz="1000">
+                        <a:defRPr sz="900">
                           <a:solidFill>
                             <a:srgbClr val="0B1B2D"/>
                           </a:solidFill>
@@ -15144,7 +15120,7 @@
         </p:nvGraphicFramePr>
         <p:xfrm>
           <a:off x="731520" y="1828800"/>
-          <a:ext cx="5120640" cy="2286000"/>
+          <a:ext cx="5120640" cy="2057400"/>
         </p:xfrm>
         <a:graphic>
           <a:graphicData uri="http://schemas.openxmlformats.org/drawingml/2006/table">
@@ -15157,14 +15133,14 @@
                 <a:gridCol w="1706880"/>
                 <a:gridCol w="1706880"/>
               </a:tblGrid>
-              <a:tr h="457200">
+              <a:tr h="411480">
                 <a:tc>
                   <a:txBody>
                     <a:bodyPr/>
                     <a:lstStyle/>
                     <a:p>
                       <a:pPr>
-                        <a:defRPr b="1" sz="1100">
+                        <a:defRPr b="1" sz="1000">
                           <a:solidFill>
                             <a:srgbClr val="FFFFFF"/>
                           </a:solidFill>
@@ -15187,7 +15163,7 @@
                     <a:lstStyle/>
                     <a:p>
                       <a:pPr>
-                        <a:defRPr b="1" sz="1100">
+                        <a:defRPr b="1" sz="1000">
                           <a:solidFill>
                             <a:srgbClr val="FFFFFF"/>
                           </a:solidFill>
@@ -15210,7 +15186,7 @@
                     <a:lstStyle/>
                     <a:p>
                       <a:pPr>
-                        <a:defRPr b="1" sz="1100">
+                        <a:defRPr b="1" sz="1000">
                           <a:solidFill>
                             <a:srgbClr val="FFFFFF"/>
                           </a:solidFill>
@@ -15228,14 +15204,14 @@
                   </a:tcPr>
                 </a:tc>
               </a:tr>
-              <a:tr h="457200">
+              <a:tr h="411480">
                 <a:tc>
                   <a:txBody>
                     <a:bodyPr/>
                     <a:lstStyle/>
                     <a:p>
                       <a:pPr>
-                        <a:defRPr sz="1000">
+                        <a:defRPr sz="900">
                           <a:solidFill>
                             <a:srgbClr val="0B1B2D"/>
                           </a:solidFill>
@@ -15258,7 +15234,7 @@
                     <a:lstStyle/>
                     <a:p>
                       <a:pPr>
-                        <a:defRPr sz="1000">
+                        <a:defRPr sz="900">
                           <a:solidFill>
                             <a:srgbClr val="0B1B2D"/>
                           </a:solidFill>
@@ -15281,7 +15257,7 @@
                     <a:lstStyle/>
                     <a:p>
                       <a:pPr>
-                        <a:defRPr sz="1000">
+                        <a:defRPr sz="900">
                           <a:solidFill>
                             <a:srgbClr val="0B1B2D"/>
                           </a:solidFill>
@@ -15299,14 +15275,14 @@
                   </a:tcPr>
                 </a:tc>
               </a:tr>
-              <a:tr h="457200">
+              <a:tr h="411480">
                 <a:tc>
                   <a:txBody>
                     <a:bodyPr/>
                     <a:lstStyle/>
                     <a:p>
                       <a:pPr>
-                        <a:defRPr sz="1000">
+                        <a:defRPr sz="900">
                           <a:solidFill>
                             <a:srgbClr val="0B1B2D"/>
                           </a:solidFill>
@@ -15329,7 +15305,7 @@
                     <a:lstStyle/>
                     <a:p>
                       <a:pPr>
-                        <a:defRPr sz="1000">
+                        <a:defRPr sz="900">
                           <a:solidFill>
                             <a:srgbClr val="0B1B2D"/>
                           </a:solidFill>
@@ -15352,7 +15328,7 @@
                     <a:lstStyle/>
                     <a:p>
                       <a:pPr>
-                        <a:defRPr sz="1000">
+                        <a:defRPr sz="900">
                           <a:solidFill>
                             <a:srgbClr val="0B1B2D"/>
                           </a:solidFill>
@@ -15370,14 +15346,14 @@
                   </a:tcPr>
                 </a:tc>
               </a:tr>
-              <a:tr h="457200">
+              <a:tr h="411480">
                 <a:tc>
                   <a:txBody>
                     <a:bodyPr/>
                     <a:lstStyle/>
                     <a:p>
                       <a:pPr>
-                        <a:defRPr sz="1000">
+                        <a:defRPr sz="900">
                           <a:solidFill>
                             <a:srgbClr val="0B1B2D"/>
                           </a:solidFill>
@@ -15400,7 +15376,7 @@
                     <a:lstStyle/>
                     <a:p>
                       <a:pPr>
-                        <a:defRPr sz="1000">
+                        <a:defRPr sz="900">
                           <a:solidFill>
                             <a:srgbClr val="0B1B2D"/>
                           </a:solidFill>
@@ -15423,7 +15399,7 @@
                     <a:lstStyle/>
                     <a:p>
                       <a:pPr>
-                        <a:defRPr sz="1000">
+                        <a:defRPr sz="900">
                           <a:solidFill>
                             <a:srgbClr val="0B1B2D"/>
                           </a:solidFill>
@@ -15441,14 +15417,14 @@
                   </a:tcPr>
                 </a:tc>
               </a:tr>
-              <a:tr h="457200">
+              <a:tr h="411480">
                 <a:tc>
                   <a:txBody>
                     <a:bodyPr/>
                     <a:lstStyle/>
                     <a:p>
                       <a:pPr>
-                        <a:defRPr sz="1000">
+                        <a:defRPr sz="900">
                           <a:solidFill>
                             <a:srgbClr val="0B1B2D"/>
                           </a:solidFill>
@@ -15471,7 +15447,7 @@
                     <a:lstStyle/>
                     <a:p>
                       <a:pPr>
-                        <a:defRPr sz="1000">
+                        <a:defRPr sz="900">
                           <a:solidFill>
                             <a:srgbClr val="0B1B2D"/>
                           </a:solidFill>
@@ -15494,7 +15470,7 @@
                     <a:lstStyle/>
                     <a:p>
                       <a:pPr>
-                        <a:defRPr sz="1000">
+                        <a:defRPr sz="900">
                           <a:solidFill>
                             <a:srgbClr val="0B1B2D"/>
                           </a:solidFill>
@@ -17511,7 +17487,7 @@
         </p:nvGraphicFramePr>
         <p:xfrm>
           <a:off x="731520" y="1828800"/>
-          <a:ext cx="5120640" cy="2286000"/>
+          <a:ext cx="5120640" cy="2057400"/>
         </p:xfrm>
         <a:graphic>
           <a:graphicData uri="http://schemas.openxmlformats.org/drawingml/2006/table">
@@ -17524,14 +17500,14 @@
                 <a:gridCol w="1706880"/>
                 <a:gridCol w="1706880"/>
               </a:tblGrid>
-              <a:tr h="457200">
+              <a:tr h="411480">
                 <a:tc>
                   <a:txBody>
                     <a:bodyPr/>
                     <a:lstStyle/>
                     <a:p>
                       <a:pPr>
-                        <a:defRPr b="1" sz="1100">
+                        <a:defRPr b="1" sz="1000">
                           <a:solidFill>
                             <a:srgbClr val="FFFFFF"/>
                           </a:solidFill>
@@ -17554,7 +17530,7 @@
                     <a:lstStyle/>
                     <a:p>
                       <a:pPr>
-                        <a:defRPr b="1" sz="1100">
+                        <a:defRPr b="1" sz="1000">
                           <a:solidFill>
                             <a:srgbClr val="FFFFFF"/>
                           </a:solidFill>
@@ -17577,7 +17553,7 @@
                     <a:lstStyle/>
                     <a:p>
                       <a:pPr>
-                        <a:defRPr b="1" sz="1100">
+                        <a:defRPr b="1" sz="1000">
                           <a:solidFill>
                             <a:srgbClr val="FFFFFF"/>
                           </a:solidFill>
@@ -17595,14 +17571,14 @@
                   </a:tcPr>
                 </a:tc>
               </a:tr>
-              <a:tr h="457200">
+              <a:tr h="411480">
                 <a:tc>
                   <a:txBody>
                     <a:bodyPr/>
                     <a:lstStyle/>
                     <a:p>
                       <a:pPr>
-                        <a:defRPr sz="1000">
+                        <a:defRPr sz="900">
                           <a:solidFill>
                             <a:srgbClr val="0B1B2D"/>
                           </a:solidFill>
@@ -17625,7 +17601,7 @@
                     <a:lstStyle/>
                     <a:p>
                       <a:pPr>
-                        <a:defRPr sz="1000">
+                        <a:defRPr sz="900">
                           <a:solidFill>
                             <a:srgbClr val="0B1B2D"/>
                           </a:solidFill>
@@ -17648,7 +17624,7 @@
                     <a:lstStyle/>
                     <a:p>
                       <a:pPr>
-                        <a:defRPr sz="1000">
+                        <a:defRPr sz="900">
                           <a:solidFill>
                             <a:srgbClr val="0B1B2D"/>
                           </a:solidFill>
@@ -17666,14 +17642,14 @@
                   </a:tcPr>
                 </a:tc>
               </a:tr>
-              <a:tr h="457200">
+              <a:tr h="411480">
                 <a:tc>
                   <a:txBody>
                     <a:bodyPr/>
                     <a:lstStyle/>
                     <a:p>
                       <a:pPr>
-                        <a:defRPr sz="1000">
+                        <a:defRPr sz="900">
                           <a:solidFill>
                             <a:srgbClr val="0B1B2D"/>
                           </a:solidFill>
@@ -17696,7 +17672,7 @@
                     <a:lstStyle/>
                     <a:p>
                       <a:pPr>
-                        <a:defRPr sz="1000">
+                        <a:defRPr sz="900">
                           <a:solidFill>
                             <a:srgbClr val="0B1B2D"/>
                           </a:solidFill>
@@ -17719,7 +17695,7 @@
                     <a:lstStyle/>
                     <a:p>
                       <a:pPr>
-                        <a:defRPr sz="1000">
+                        <a:defRPr sz="900">
                           <a:solidFill>
                             <a:srgbClr val="0B1B2D"/>
                           </a:solidFill>
@@ -17737,14 +17713,14 @@
                   </a:tcPr>
                 </a:tc>
               </a:tr>
-              <a:tr h="457200">
+              <a:tr h="411480">
                 <a:tc>
                   <a:txBody>
                     <a:bodyPr/>
                     <a:lstStyle/>
                     <a:p>
                       <a:pPr>
-                        <a:defRPr sz="1000">
+                        <a:defRPr sz="900">
                           <a:solidFill>
                             <a:srgbClr val="0B1B2D"/>
                           </a:solidFill>
@@ -17767,7 +17743,7 @@
                     <a:lstStyle/>
                     <a:p>
                       <a:pPr>
-                        <a:defRPr sz="1000">
+                        <a:defRPr sz="900">
                           <a:solidFill>
                             <a:srgbClr val="0B1B2D"/>
                           </a:solidFill>
@@ -17790,7 +17766,7 @@
                     <a:lstStyle/>
                     <a:p>
                       <a:pPr>
-                        <a:defRPr sz="1000">
+                        <a:defRPr sz="900">
                           <a:solidFill>
                             <a:srgbClr val="0B1B2D"/>
                           </a:solidFill>
@@ -17808,14 +17784,14 @@
                   </a:tcPr>
                 </a:tc>
               </a:tr>
-              <a:tr h="457200">
+              <a:tr h="411480">
                 <a:tc>
                   <a:txBody>
                     <a:bodyPr/>
                     <a:lstStyle/>
                     <a:p>
                       <a:pPr>
-                        <a:defRPr sz="1000">
+                        <a:defRPr sz="900">
                           <a:solidFill>
                             <a:srgbClr val="0B1B2D"/>
                           </a:solidFill>
@@ -17838,7 +17814,7 @@
                     <a:lstStyle/>
                     <a:p>
                       <a:pPr>
-                        <a:defRPr sz="1000">
+                        <a:defRPr sz="900">
                           <a:solidFill>
                             <a:srgbClr val="0B1B2D"/>
                           </a:solidFill>
@@ -17861,7 +17837,7 @@
                     <a:lstStyle/>
                     <a:p>
                       <a:pPr>
-                        <a:defRPr sz="1000">
+                        <a:defRPr sz="900">
                           <a:solidFill>
                             <a:srgbClr val="0B1B2D"/>
                           </a:solidFill>
